--- a/data-eng/decks/w2d4s4.pptx
+++ b/data-eng/decks/w2d4s4.pptx
@@ -3098,7 +3098,7 @@
       <p:grpSpPr/>
       <p:sp>
         <p:nvSpPr>
-          <p:cNvPr id="2" name="Oval 1"/>
+          <p:cNvPr id="2" name="deckgen:decor"/>
           <p:cNvSpPr/>
           <p:nvPr/>
         </p:nvSpPr>
@@ -3128,7 +3128,7 @@
       </p:sp>
       <p:sp>
         <p:nvSpPr>
-          <p:cNvPr id="3" name="Oval 2"/>
+          <p:cNvPr id="3" name="deckgen:decor"/>
           <p:cNvSpPr/>
           <p:nvPr/>
         </p:nvSpPr>
@@ -3158,7 +3158,7 @@
       </p:sp>
       <p:sp>
         <p:nvSpPr>
-          <p:cNvPr id="4" name="Oval 3"/>
+          <p:cNvPr id="4" name="deckgen:decor"/>
           <p:cNvSpPr/>
           <p:nvPr/>
         </p:nvSpPr>
@@ -3188,7 +3188,7 @@
       </p:sp>
       <p:sp>
         <p:nvSpPr>
-          <p:cNvPr id="5" name="Rectangle 4"/>
+          <p:cNvPr id="5" name="deckgen:decor"/>
           <p:cNvSpPr/>
           <p:nvPr/>
         </p:nvSpPr>
@@ -3218,7 +3218,7 @@
       </p:sp>
       <p:sp>
         <p:nvSpPr>
-          <p:cNvPr id="6" name="Oval 5"/>
+          <p:cNvPr id="6" name="deckgen:decor"/>
           <p:cNvSpPr/>
           <p:nvPr/>
         </p:nvSpPr>
@@ -3248,7 +3248,7 @@
       </p:sp>
       <p:sp>
         <p:nvSpPr>
-          <p:cNvPr id="7" name="Oval 6"/>
+          <p:cNvPr id="7" name="deckgen:decor"/>
           <p:cNvSpPr/>
           <p:nvPr/>
         </p:nvSpPr>
@@ -3278,7 +3278,7 @@
       </p:sp>
       <p:sp>
         <p:nvSpPr>
-          <p:cNvPr id="8" name="Oval 7"/>
+          <p:cNvPr id="8" name="deckgen:decor"/>
           <p:cNvSpPr/>
           <p:nvPr/>
         </p:nvSpPr>
@@ -3308,7 +3308,7 @@
       </p:sp>
       <p:sp>
         <p:nvSpPr>
-          <p:cNvPr id="9" name="Oval 8"/>
+          <p:cNvPr id="9" name="deckgen:decor"/>
           <p:cNvSpPr/>
           <p:nvPr/>
         </p:nvSpPr>
@@ -3338,7 +3338,7 @@
       </p:sp>
       <p:sp>
         <p:nvSpPr>
-          <p:cNvPr id="10" name="Rectangle 9"/>
+          <p:cNvPr id="10" name="deckgen:decor"/>
           <p:cNvSpPr/>
           <p:nvPr/>
         </p:nvSpPr>
@@ -3598,7 +3598,7 @@
       <p:grpSpPr/>
       <p:sp>
         <p:nvSpPr>
-          <p:cNvPr id="2" name="Oval 1"/>
+          <p:cNvPr id="2" name="deckgen:decor"/>
           <p:cNvSpPr/>
           <p:nvPr/>
         </p:nvSpPr>
@@ -3628,7 +3628,7 @@
       </p:sp>
       <p:sp>
         <p:nvSpPr>
-          <p:cNvPr id="3" name="Oval 2"/>
+          <p:cNvPr id="3" name="deckgen:decor"/>
           <p:cNvSpPr/>
           <p:nvPr/>
         </p:nvSpPr>
@@ -3658,7 +3658,7 @@
       </p:sp>
       <p:sp>
         <p:nvSpPr>
-          <p:cNvPr id="4" name="Oval 3"/>
+          <p:cNvPr id="4" name="deckgen:decor"/>
           <p:cNvSpPr/>
           <p:nvPr/>
         </p:nvSpPr>
@@ -4085,7 +4085,7 @@
                 <a:ea typeface="Pretendard"/>
                 <a:cs typeface="Pretendard"/>
               </a:rPr>
-              <a:t>옆 사람의 ERD 를 세 질문으로 읽어 본다</a:t>
+              <a:t>소회의실에서 서로의 ERD 를 세 질문으로 읽어 본다</a:t>
             </a:r>
           </a:p>
         </p:txBody>
@@ -4377,7 +4377,7 @@
                 <a:ea typeface="Pretendard"/>
                 <a:cs typeface="Pretendard"/>
               </a:rPr>
-              <a:t>2-5 크롤러 사전 준비(가상환경·패키지)를 확인한다</a:t>
+              <a:t>설계서에 넣을 ERD 그림(사진·캡처)을 챙긴다</a:t>
             </a:r>
           </a:p>
         </p:txBody>
@@ -4589,7 +4589,7 @@
       <p:grpSpPr/>
       <p:sp>
         <p:nvSpPr>
-          <p:cNvPr id="2" name="Oval 1"/>
+          <p:cNvPr id="2" name="deckgen:decor"/>
           <p:cNvSpPr/>
           <p:nvPr/>
         </p:nvSpPr>
@@ -4619,7 +4619,7 @@
       </p:sp>
       <p:sp>
         <p:nvSpPr>
-          <p:cNvPr id="3" name="Oval 2"/>
+          <p:cNvPr id="3" name="deckgen:decor"/>
           <p:cNvSpPr/>
           <p:nvPr/>
         </p:nvSpPr>
@@ -4649,7 +4649,7 @@
       </p:sp>
       <p:sp>
         <p:nvSpPr>
-          <p:cNvPr id="4" name="Oval 3"/>
+          <p:cNvPr id="4" name="deckgen:decor"/>
           <p:cNvSpPr/>
           <p:nvPr/>
         </p:nvSpPr>
@@ -6300,7 +6300,7 @@
       <p:grpSpPr/>
       <p:sp>
         <p:nvSpPr>
-          <p:cNvPr id="2" name="Oval 1"/>
+          <p:cNvPr id="2" name="deckgen:decor"/>
           <p:cNvSpPr/>
           <p:nvPr/>
         </p:nvSpPr>
@@ -6330,7 +6330,7 @@
       </p:sp>
       <p:sp>
         <p:nvSpPr>
-          <p:cNvPr id="3" name="Oval 2"/>
+          <p:cNvPr id="3" name="deckgen:decor"/>
           <p:cNvSpPr/>
           <p:nvPr/>
         </p:nvSpPr>
@@ -6360,7 +6360,7 @@
       </p:sp>
       <p:sp>
         <p:nvSpPr>
-          <p:cNvPr id="4" name="Oval 3"/>
+          <p:cNvPr id="4" name="deckgen:decor"/>
           <p:cNvSpPr/>
           <p:nvPr/>
         </p:nvSpPr>
@@ -6424,7 +6424,7 @@
                 <a:ea typeface="Pretendard"/>
                 <a:cs typeface="Pretendard"/>
               </a:rPr>
-              <a:t>서로의 ERD 바꿔 읽기</a:t>
+              <a:t>소회의실 · 서로의 ERD 읽기</a:t>
             </a:r>
           </a:p>
         </p:txBody>
@@ -6465,7 +6465,7 @@
                 <a:ea typeface="Pretendard"/>
                 <a:cs typeface="Pretendard"/>
               </a:rPr>
-              <a:t>옆 사람의 ERD 에 던질 세 질문</a:t>
+              <a:t>화면 공유된 ERD 에 던질 세 질문</a:t>
             </a:r>
           </a:p>
         </p:txBody>
@@ -6566,7 +6566,7 @@
       </p:sp>
       <p:sp>
         <p:nvSpPr>
-          <p:cNvPr id="10" name="TextBox 9"/>
+          <p:cNvPr id="10" name="deckgen:ornament"/>
           <p:cNvSpPr txBox="1"/>
           <p:nvPr/>
         </p:nvSpPr>
@@ -6751,7 +6751,7 @@
       </p:sp>
       <p:sp>
         <p:nvSpPr>
-          <p:cNvPr id="14" name="TextBox 13"/>
+          <p:cNvPr id="14" name="deckgen:ornament"/>
           <p:cNvSpPr txBox="1"/>
           <p:nvPr/>
         </p:nvSpPr>
@@ -6936,7 +6936,7 @@
       </p:sp>
       <p:sp>
         <p:nvSpPr>
-          <p:cNvPr id="18" name="TextBox 17"/>
+          <p:cNvPr id="18" name="deckgen:ornament"/>
           <p:cNvSpPr txBox="1"/>
           <p:nvPr/>
         </p:nvSpPr>
@@ -7258,7 +7258,7 @@
       <p:grpSpPr/>
       <p:sp>
         <p:nvSpPr>
-          <p:cNvPr id="2" name="Oval 1"/>
+          <p:cNvPr id="2" name="deckgen:decor"/>
           <p:cNvSpPr/>
           <p:nvPr/>
         </p:nvSpPr>
@@ -7288,7 +7288,7 @@
       </p:sp>
       <p:sp>
         <p:nvSpPr>
-          <p:cNvPr id="3" name="Oval 2"/>
+          <p:cNvPr id="3" name="deckgen:decor"/>
           <p:cNvSpPr/>
           <p:nvPr/>
         </p:nvSpPr>
@@ -7318,7 +7318,7 @@
       </p:sp>
       <p:sp>
         <p:nvSpPr>
-          <p:cNvPr id="4" name="Oval 3"/>
+          <p:cNvPr id="4" name="deckgen:decor"/>
           <p:cNvSpPr/>
           <p:nvPr/>
         </p:nvSpPr>
@@ -7423,7 +7423,7 @@
                 <a:ea typeface="Pretendard"/>
                 <a:cs typeface="Pretendard"/>
               </a:rPr>
-              <a:t>여덟 개를 스스로 확인해 보세요</a:t>
+              <a:t>여덟 개를 스스로 — 나머지 둘은 노트에</a:t>
             </a:r>
           </a:p>
         </p:txBody>
@@ -8758,7 +8758,7 @@
       <p:grpSpPr/>
       <p:sp>
         <p:nvSpPr>
-          <p:cNvPr id="2" name="Oval 1"/>
+          <p:cNvPr id="2" name="deckgen:decor"/>
           <p:cNvSpPr/>
           <p:nvPr/>
         </p:nvSpPr>
@@ -8788,7 +8788,7 @@
       </p:sp>
       <p:sp>
         <p:nvSpPr>
-          <p:cNvPr id="3" name="Oval 2"/>
+          <p:cNvPr id="3" name="deckgen:decor"/>
           <p:cNvSpPr/>
           <p:nvPr/>
         </p:nvSpPr>
@@ -8818,7 +8818,7 @@
       </p:sp>
       <p:sp>
         <p:nvSpPr>
-          <p:cNvPr id="4" name="Oval 3"/>
+          <p:cNvPr id="4" name="deckgen:decor"/>
           <p:cNvSpPr/>
           <p:nvPr/>
         </p:nvSpPr>
@@ -9799,7 +9799,7 @@
                 <a:ea typeface="Pretendard"/>
                 <a:cs typeface="Pretendard"/>
               </a:rPr>
-              <a:t>ERROR 1451</a:t>
+              <a:t>ERROR 3730</a:t>
             </a:r>
           </a:p>
           <a:p>
@@ -9817,7 +9817,7 @@
                 <a:ea typeface="Pretendard"/>
                 <a:cs typeface="Pretendard"/>
               </a:rPr>
-              <a:t>parent row</a:t>
+              <a:t>referenced by FK</a:t>
             </a:r>
           </a:p>
         </p:txBody>
@@ -9892,7 +9892,7 @@
                 <a:ea typeface="Pretendard"/>
                 <a:cs typeface="Pretendard"/>
               </a:rPr>
-              <a:t>자식이 참조 중인</a:t>
+              <a:t>자식 표가 참조 중인</a:t>
             </a:r>
           </a:p>
           <a:p>
@@ -9910,7 +9910,7 @@
                 <a:ea typeface="Pretendard"/>
                 <a:cs typeface="Pretendard"/>
               </a:rPr>
-              <a:t>부모 행을 지우려 함</a:t>
+              <a:t>부모 표를 DROP</a:t>
             </a:r>
           </a:p>
         </p:txBody>
@@ -9985,7 +9985,7 @@
                 <a:ea typeface="Pretendard"/>
                 <a:cs typeface="Pretendard"/>
               </a:rPr>
-              <a:t>자식 행부터 지우고</a:t>
+              <a:t>order_items → orders</a:t>
             </a:r>
           </a:p>
           <a:p>
@@ -10003,7 +10003,7 @@
                 <a:ea typeface="Pretendard"/>
                 <a:cs typeface="Pretendard"/>
               </a:rPr>
-              <a:t>부모를 지운다</a:t>
+              <a:t>→ customers 순서</a:t>
             </a:r>
           </a:p>
         </p:txBody>
@@ -10078,7 +10078,7 @@
                 <a:ea typeface="Pretendard"/>
                 <a:cs typeface="Pretendard"/>
               </a:rPr>
-              <a:t>조인 후 건수가</a:t>
+              <a:t>ERROR 1451</a:t>
             </a:r>
           </a:p>
           <a:p>
@@ -10096,7 +10096,7 @@
                 <a:ea typeface="Pretendard"/>
                 <a:cs typeface="Pretendard"/>
               </a:rPr>
-              <a:t>실제보다 많다</a:t>
+              <a:t>parent row</a:t>
             </a:r>
           </a:p>
         </p:txBody>
@@ -10171,7 +10171,7 @@
                 <a:ea typeface="Pretendard"/>
                 <a:cs typeface="Pretendard"/>
               </a:rPr>
-              <a:t>1:N 조인 뒤 COUNT 가</a:t>
+              <a:t>자식이 참조 중인</a:t>
             </a:r>
           </a:p>
           <a:p>
@@ -10189,7 +10189,7 @@
                 <a:ea typeface="Pretendard"/>
                 <a:cs typeface="Pretendard"/>
               </a:rPr>
-              <a:t>N 쪽만큼 부풀림</a:t>
+              <a:t>부모 행을 지우려 함</a:t>
             </a:r>
           </a:p>
         </p:txBody>
@@ -10264,6 +10264,285 @@
                 <a:ea typeface="Pretendard"/>
                 <a:cs typeface="Pretendard"/>
               </a:rPr>
+              <a:t>자식 행부터 지우고</a:t>
+            </a:r>
+          </a:p>
+          <a:p>
+            <a:pPr algn="ctr">
+              <a:lnSpc>
+                <a:spcPct val="115000"/>
+              </a:lnSpc>
+            </a:pPr>
+            <a:r>
+              <a:rPr sz="1875" b="0">
+                <a:solidFill>
+                  <a:srgbClr val="3D3D3D"/>
+                </a:solidFill>
+                <a:latin typeface="Pretendard"/>
+                <a:ea typeface="Pretendard"/>
+                <a:cs typeface="Pretendard"/>
+              </a:rPr>
+              <a:t>부모를 지운다</a:t>
+            </a:r>
+          </a:p>
+        </p:txBody>
+      </p:sp>
+      <p:sp>
+        <p:nvSpPr>
+          <p:cNvPr id="38" name="Rounded Rectangle 37"/>
+          <p:cNvSpPr/>
+          <p:nvPr/>
+        </p:nvSpPr>
+        <p:spPr>
+          <a:xfrm>
+            <a:off x="1143000" y="6343650"/>
+            <a:ext cx="4442460" cy="647700"/>
+          </a:xfrm>
+          <a:prstGeom prst="roundRect">
+            <a:avLst>
+              <a:gd name="adj" fmla="val 5882"/>
+            </a:avLst>
+          </a:prstGeom>
+          <a:solidFill>
+            <a:srgbClr val="EDF3FD"/>
+          </a:solidFill>
+          <a:ln w="9525">
+            <a:solidFill>
+              <a:srgbClr val="BFD3F5"/>
+            </a:solidFill>
+          </a:ln>
+          <a:effectLst/>
+        </p:spPr>
+        <p:txBody>
+          <a:bodyPr rtlCol="0" anchor="ctr" wrap="square"/>
+          <a:lstStyle/>
+          <a:p>
+            <a:pPr algn="ctr"/>
+          </a:p>
+        </p:txBody>
+      </p:sp>
+      <p:sp>
+        <p:nvSpPr>
+          <p:cNvPr id="39" name="TextBox 38"/>
+          <p:cNvSpPr txBox="1"/>
+          <p:nvPr/>
+        </p:nvSpPr>
+        <p:spPr>
+          <a:xfrm>
+            <a:off x="1238250" y="6343650"/>
+            <a:ext cx="4251960" cy="647700"/>
+          </a:xfrm>
+          <a:prstGeom prst="rect">
+            <a:avLst/>
+          </a:prstGeom>
+          <a:noFill/>
+        </p:spPr>
+        <p:txBody>
+          <a:bodyPr wrap="square" lIns="0" rIns="0" tIns="0" bIns="0" anchor="ctr">
+            <a:spAutoFit/>
+          </a:bodyPr>
+          <a:lstStyle/>
+          <a:p>
+            <a:pPr algn="l">
+              <a:lnSpc>
+                <a:spcPct val="115000"/>
+              </a:lnSpc>
+            </a:pPr>
+            <a:r>
+              <a:rPr sz="1875" b="1">
+                <a:solidFill>
+                  <a:srgbClr val="0D2B5E"/>
+                </a:solidFill>
+                <a:latin typeface="Pretendard"/>
+                <a:ea typeface="Pretendard"/>
+                <a:cs typeface="Pretendard"/>
+              </a:rPr>
+              <a:t>조인 후 건수가</a:t>
+            </a:r>
+          </a:p>
+          <a:p>
+            <a:pPr algn="l">
+              <a:lnSpc>
+                <a:spcPct val="115000"/>
+              </a:lnSpc>
+            </a:pPr>
+            <a:r>
+              <a:rPr sz="1875" b="1">
+                <a:solidFill>
+                  <a:srgbClr val="0D2B5E"/>
+                </a:solidFill>
+                <a:latin typeface="Pretendard"/>
+                <a:ea typeface="Pretendard"/>
+                <a:cs typeface="Pretendard"/>
+              </a:rPr>
+              <a:t>실제보다 많다</a:t>
+            </a:r>
+          </a:p>
+        </p:txBody>
+      </p:sp>
+      <p:sp>
+        <p:nvSpPr>
+          <p:cNvPr id="40" name="Rounded Rectangle 39"/>
+          <p:cNvSpPr/>
+          <p:nvPr/>
+        </p:nvSpPr>
+        <p:spPr>
+          <a:xfrm>
+            <a:off x="5623560" y="6343650"/>
+            <a:ext cx="5402580" cy="647700"/>
+          </a:xfrm>
+          <a:prstGeom prst="roundRect">
+            <a:avLst>
+              <a:gd name="adj" fmla="val 5882"/>
+            </a:avLst>
+          </a:prstGeom>
+          <a:solidFill>
+            <a:srgbClr val="FAFBFD"/>
+          </a:solidFill>
+          <a:ln w="9525">
+            <a:solidFill>
+              <a:srgbClr val="DCE1E8"/>
+            </a:solidFill>
+          </a:ln>
+          <a:effectLst/>
+        </p:spPr>
+        <p:txBody>
+          <a:bodyPr rtlCol="0" anchor="ctr" wrap="square"/>
+          <a:lstStyle/>
+          <a:p>
+            <a:pPr algn="ctr"/>
+          </a:p>
+        </p:txBody>
+      </p:sp>
+      <p:sp>
+        <p:nvSpPr>
+          <p:cNvPr id="41" name="TextBox 40"/>
+          <p:cNvSpPr txBox="1"/>
+          <p:nvPr/>
+        </p:nvSpPr>
+        <p:spPr>
+          <a:xfrm>
+            <a:off x="5718810" y="6343650"/>
+            <a:ext cx="5212080" cy="647700"/>
+          </a:xfrm>
+          <a:prstGeom prst="rect">
+            <a:avLst/>
+          </a:prstGeom>
+          <a:noFill/>
+        </p:spPr>
+        <p:txBody>
+          <a:bodyPr wrap="square" lIns="0" rIns="0" tIns="0" bIns="0" anchor="ctr">
+            <a:spAutoFit/>
+          </a:bodyPr>
+          <a:lstStyle/>
+          <a:p>
+            <a:pPr algn="ctr">
+              <a:lnSpc>
+                <a:spcPct val="115000"/>
+              </a:lnSpc>
+            </a:pPr>
+            <a:r>
+              <a:rPr sz="1875" b="0">
+                <a:solidFill>
+                  <a:srgbClr val="3D3D3D"/>
+                </a:solidFill>
+                <a:latin typeface="Pretendard"/>
+                <a:ea typeface="Pretendard"/>
+                <a:cs typeface="Pretendard"/>
+              </a:rPr>
+              <a:t>1:N 조인 뒤 COUNT 가</a:t>
+            </a:r>
+          </a:p>
+          <a:p>
+            <a:pPr algn="ctr">
+              <a:lnSpc>
+                <a:spcPct val="115000"/>
+              </a:lnSpc>
+            </a:pPr>
+            <a:r>
+              <a:rPr sz="1875" b="0">
+                <a:solidFill>
+                  <a:srgbClr val="3D3D3D"/>
+                </a:solidFill>
+                <a:latin typeface="Pretendard"/>
+                <a:ea typeface="Pretendard"/>
+                <a:cs typeface="Pretendard"/>
+              </a:rPr>
+              <a:t>N 쪽만큼 부풀림</a:t>
+            </a:r>
+          </a:p>
+        </p:txBody>
+      </p:sp>
+      <p:sp>
+        <p:nvSpPr>
+          <p:cNvPr id="42" name="Rounded Rectangle 41"/>
+          <p:cNvSpPr/>
+          <p:nvPr/>
+        </p:nvSpPr>
+        <p:spPr>
+          <a:xfrm>
+            <a:off x="11064240" y="6343650"/>
+            <a:ext cx="6080760" cy="647700"/>
+          </a:xfrm>
+          <a:prstGeom prst="roundRect">
+            <a:avLst>
+              <a:gd name="adj" fmla="val 5882"/>
+            </a:avLst>
+          </a:prstGeom>
+          <a:solidFill>
+            <a:srgbClr val="FAFBFD"/>
+          </a:solidFill>
+          <a:ln w="9525">
+            <a:solidFill>
+              <a:srgbClr val="DCE1E8"/>
+            </a:solidFill>
+          </a:ln>
+          <a:effectLst/>
+        </p:spPr>
+        <p:txBody>
+          <a:bodyPr rtlCol="0" anchor="ctr" wrap="square"/>
+          <a:lstStyle/>
+          <a:p>
+            <a:pPr algn="ctr"/>
+          </a:p>
+        </p:txBody>
+      </p:sp>
+      <p:sp>
+        <p:nvSpPr>
+          <p:cNvPr id="43" name="TextBox 42"/>
+          <p:cNvSpPr txBox="1"/>
+          <p:nvPr/>
+        </p:nvSpPr>
+        <p:spPr>
+          <a:xfrm>
+            <a:off x="11159490" y="6343650"/>
+            <a:ext cx="5890260" cy="647700"/>
+          </a:xfrm>
+          <a:prstGeom prst="rect">
+            <a:avLst/>
+          </a:prstGeom>
+          <a:noFill/>
+        </p:spPr>
+        <p:txBody>
+          <a:bodyPr wrap="square" lIns="0" rIns="0" tIns="0" bIns="0" anchor="ctr">
+            <a:spAutoFit/>
+          </a:bodyPr>
+          <a:lstStyle/>
+          <a:p>
+            <a:pPr algn="ctr">
+              <a:lnSpc>
+                <a:spcPct val="115000"/>
+              </a:lnSpc>
+            </a:pPr>
+            <a:r>
+              <a:rPr sz="1875" b="0">
+                <a:solidFill>
+                  <a:srgbClr val="3D3D3D"/>
+                </a:solidFill>
+                <a:latin typeface="Pretendard"/>
+                <a:ea typeface="Pretendard"/>
+                <a:cs typeface="Pretendard"/>
+              </a:rPr>
               <a:t>COUNT(DISTINCT 주문id)</a:t>
             </a:r>
           </a:p>
@@ -10289,7 +10568,7 @@
       </p:sp>
       <p:sp>
         <p:nvSpPr>
-          <p:cNvPr id="38" name="TextBox 37"/>
+          <p:cNvPr id="44" name="TextBox 43"/>
           <p:cNvSpPr txBox="1"/>
           <p:nvPr/>
         </p:nvSpPr>
@@ -10330,7 +10609,7 @@
       </p:sp>
       <p:sp>
         <p:nvSpPr>
-          <p:cNvPr id="39" name="Rectangle 38"/>
+          <p:cNvPr id="45" name="Rectangle 44"/>
           <p:cNvSpPr/>
           <p:nvPr/>
         </p:nvSpPr>
@@ -10360,7 +10639,7 @@
       </p:sp>
       <p:sp>
         <p:nvSpPr>
-          <p:cNvPr id="40" name="TextBox 39"/>
+          <p:cNvPr id="46" name="TextBox 45"/>
           <p:cNvSpPr txBox="1"/>
           <p:nvPr/>
         </p:nvSpPr>
@@ -10401,7 +10680,7 @@
       </p:sp>
       <p:sp>
         <p:nvSpPr>
-          <p:cNvPr id="41" name="TextBox 40"/>
+          <p:cNvPr id="47" name="TextBox 46"/>
           <p:cNvSpPr txBox="1"/>
           <p:nvPr/>
         </p:nvSpPr>
@@ -10460,7 +10739,7 @@
       <p:grpSpPr/>
       <p:sp>
         <p:nvSpPr>
-          <p:cNvPr id="2" name="Oval 1"/>
+          <p:cNvPr id="2" name="deckgen:decor"/>
           <p:cNvSpPr/>
           <p:nvPr/>
         </p:nvSpPr>
@@ -10490,7 +10769,7 @@
       </p:sp>
       <p:sp>
         <p:nvSpPr>
-          <p:cNvPr id="3" name="Oval 2"/>
+          <p:cNvPr id="3" name="deckgen:decor"/>
           <p:cNvSpPr/>
           <p:nvPr/>
         </p:nvSpPr>
@@ -10520,7 +10799,7 @@
       </p:sp>
       <p:sp>
         <p:nvSpPr>
-          <p:cNvPr id="4" name="Oval 3"/>
+          <p:cNvPr id="4" name="deckgen:decor"/>
           <p:cNvSpPr/>
           <p:nvPr/>
         </p:nvSpPr>
@@ -11580,7 +11859,7 @@
       <p:grpSpPr/>
       <p:sp>
         <p:nvSpPr>
-          <p:cNvPr id="2" name="Oval 1"/>
+          <p:cNvPr id="2" name="deckgen:decor"/>
           <p:cNvSpPr/>
           <p:nvPr/>
         </p:nvSpPr>
@@ -11610,7 +11889,7 @@
       </p:sp>
       <p:sp>
         <p:nvSpPr>
-          <p:cNvPr id="3" name="Oval 2"/>
+          <p:cNvPr id="3" name="deckgen:decor"/>
           <p:cNvSpPr/>
           <p:nvPr/>
         </p:nvSpPr>
@@ -11640,7 +11919,7 @@
       </p:sp>
       <p:sp>
         <p:nvSpPr>
-          <p:cNvPr id="4" name="Oval 3"/>
+          <p:cNvPr id="4" name="deckgen:decor"/>
           <p:cNvSpPr/>
           <p:nvPr/>
         </p:nvSpPr>
@@ -11846,7 +12125,7 @@
       </p:sp>
       <p:sp>
         <p:nvSpPr>
-          <p:cNvPr id="10" name="TextBox 9"/>
+          <p:cNvPr id="10" name="deckgen:ornament"/>
           <p:cNvSpPr txBox="1"/>
           <p:nvPr/>
         </p:nvSpPr>
@@ -12031,7 +12310,7 @@
       </p:sp>
       <p:sp>
         <p:nvSpPr>
-          <p:cNvPr id="14" name="TextBox 13"/>
+          <p:cNvPr id="14" name="deckgen:ornament"/>
           <p:cNvSpPr txBox="1"/>
           <p:nvPr/>
         </p:nvSpPr>
@@ -12216,7 +12495,7 @@
       </p:sp>
       <p:sp>
         <p:nvSpPr>
-          <p:cNvPr id="18" name="TextBox 17"/>
+          <p:cNvPr id="18" name="deckgen:ornament"/>
           <p:cNvSpPr txBox="1"/>
           <p:nvPr/>
         </p:nvSpPr>
@@ -12401,7 +12680,7 @@
       </p:sp>
       <p:sp>
         <p:nvSpPr>
-          <p:cNvPr id="22" name="TextBox 21"/>
+          <p:cNvPr id="22" name="deckgen:ornament"/>
           <p:cNvSpPr txBox="1"/>
           <p:nvPr/>
         </p:nvSpPr>
@@ -12723,7 +13002,7 @@
       <p:grpSpPr/>
       <p:sp>
         <p:nvSpPr>
-          <p:cNvPr id="2" name="Oval 1"/>
+          <p:cNvPr id="2" name="deckgen:decor"/>
           <p:cNvSpPr/>
           <p:nvPr/>
         </p:nvSpPr>
@@ -12753,7 +13032,7 @@
       </p:sp>
       <p:sp>
         <p:nvSpPr>
-          <p:cNvPr id="3" name="Oval 2"/>
+          <p:cNvPr id="3" name="deckgen:decor"/>
           <p:cNvSpPr/>
           <p:nvPr/>
         </p:nvSpPr>
@@ -13393,7 +13672,7 @@
                 <a:ea typeface="Pretendard"/>
                 <a:cs typeface="Pretendard"/>
               </a:rPr>
-              <a:t>오늘 만든 표에 크롤링 데이터 적재</a:t>
+              <a:t>크롤링 데이터를 새 표 quotes 에 적재</a:t>
             </a:r>
           </a:p>
         </p:txBody>
